--- a/catalog/samples/axis_table.pptx
+++ b/catalog/samples/axis_table.pptx
@@ -1472,7 +1472,7 @@
           </a:p>
           <a:p>
             <a:r>
-              <a:t>  "template_sha256": "74ac8662cd47da15ca499c58c8a2c469475e79e82c763db93a8087ad5b481bb2"</a:t>
+              <a:t>  "template_sha256": "284afd08da7f31ec50348a2e4870870feba7911fb48f0c304d3da1c36c0e84fa"</a:t>
             </a:r>
           </a:p>
           <a:p>
